--- a/SnapTray_Prezentacio_v2.pptx
+++ b/SnapTray_Prezentacio_v2.pptx
@@ -5852,7 +5852,7 @@
         </p:nvSpPr>
         <p:spPr>
           <a:xfrm>
-            <a:off x="4754880" y="749808"/>
+            <a:off x="5158740" y="868680"/>
             <a:ext cx="4069080" cy="2880360"/>
           </a:xfrm>
           <a:prstGeom prst="rect">
@@ -5884,7 +5884,7 @@
         </p:nvSpPr>
         <p:spPr>
           <a:xfrm>
-            <a:off x="4864608" y="841248"/>
+            <a:off x="5268468" y="960120"/>
             <a:ext cx="3849624" cy="2697480"/>
           </a:xfrm>
           <a:prstGeom prst="rect">
@@ -6218,7 +6218,7 @@
       </p:sp>
       <p:sp>
         <p:nvSpPr>
-          <p:cNvPr id="9" name="Shape 7"/>
+          <p:cNvPr id="10" name="Text 8"/>
           <p:cNvSpPr/>
           <p:nvPr/>
         </p:nvSpPr>
@@ -6230,38 +6230,6 @@
           <a:prstGeom prst="rect">
             <a:avLst/>
           </a:prstGeom>
-          <a:solidFill>
-            <a:srgbClr val="CBD5E1"/>
-          </a:solidFill>
-          <a:ln w="19050">
-            <a:solidFill>
-              <a:srgbClr val="94A3B8"/>
-            </a:solidFill>
-            <a:prstDash val="solid"/>
-          </a:ln>
-        </p:spPr>
-        <p:txBody>
-          <a:bodyPr/>
-          <a:lstStyle/>
-          <a:p>
-            <a:endParaRPr lang="hu-HU"/>
-          </a:p>
-        </p:txBody>
-      </p:sp>
-      <p:sp>
-        <p:nvSpPr>
-          <p:cNvPr id="10" name="Text 8"/>
-          <p:cNvSpPr/>
-          <p:nvPr/>
-        </p:nvSpPr>
-        <p:spPr>
-          <a:xfrm>
-            <a:off x="4754880" y="3749040"/>
-            <a:ext cx="4069080" cy="1188720"/>
-          </a:xfrm>
-          <a:prstGeom prst="rect">
-            <a:avLst/>
-          </a:prstGeom>
           <a:noFill/>
           <a:ln/>
         </p:spPr>
@@ -6272,18 +6240,40 @@
             <a:pPr marL="0" indent="0" algn="ctr">
               <a:buNone/>
             </a:pPr>
-            <a:r>
-              <a:rPr lang="en-US" sz="1100" i="1" dirty="0">
-                <a:solidFill>
-                  <a:srgbClr val="475569"/>
-                </a:solidFill>
-              </a:rPr>
-              <a:t>Kepernyoőkep: Bejelentkezesi oldal / 2FA form</a:t>
-            </a:r>
             <a:endParaRPr lang="en-US" sz="1100" dirty="0"/>
           </a:p>
         </p:txBody>
       </p:sp>
+      <p:pic>
+        <p:nvPicPr>
+          <p:cNvPr id="16" name="Picture 15">
+            <a:extLst>
+              <a:ext uri="{FF2B5EF4-FFF2-40B4-BE49-F238E27FC236}">
+                <a16:creationId xmlns:a16="http://schemas.microsoft.com/office/drawing/2014/main" id="{050A008E-ACFB-D8B3-B1F9-2D6427F3D0ED}"/>
+              </a:ext>
+            </a:extLst>
+          </p:cNvPr>
+          <p:cNvPicPr>
+            <a:picLocks noChangeAspect="1"/>
+          </p:cNvPicPr>
+          <p:nvPr/>
+        </p:nvPicPr>
+        <p:blipFill>
+          <a:blip r:embed="rId3"/>
+          <a:stretch>
+            <a:fillRect/>
+          </a:stretch>
+        </p:blipFill>
+        <p:spPr>
+          <a:xfrm>
+            <a:off x="3139440" y="2759964"/>
+            <a:ext cx="1905000" cy="2239982"/>
+          </a:xfrm>
+          <a:prstGeom prst="rect">
+            <a:avLst/>
+          </a:prstGeom>
+        </p:spPr>
+      </p:pic>
     </p:spTree>
   </p:cSld>
   <p:clrMapOvr>
@@ -8726,6 +8716,36 @@
           </a:p>
         </p:txBody>
       </p:sp>
+      <p:pic>
+        <p:nvPicPr>
+          <p:cNvPr id="12" name="Picture 11">
+            <a:extLst>
+              <a:ext uri="{FF2B5EF4-FFF2-40B4-BE49-F238E27FC236}">
+                <a16:creationId xmlns:a16="http://schemas.microsoft.com/office/drawing/2014/main" id="{208203F9-E2CB-353D-D426-478B53AB9182}"/>
+              </a:ext>
+            </a:extLst>
+          </p:cNvPr>
+          <p:cNvPicPr>
+            <a:picLocks noChangeAspect="1"/>
+          </p:cNvPicPr>
+          <p:nvPr/>
+        </p:nvPicPr>
+        <p:blipFill>
+          <a:blip r:embed="rId3"/>
+          <a:stretch>
+            <a:fillRect/>
+          </a:stretch>
+        </p:blipFill>
+        <p:spPr>
+          <a:xfrm>
+            <a:off x="4669978" y="4206240"/>
+            <a:ext cx="4238884" cy="837236"/>
+          </a:xfrm>
+          <a:prstGeom prst="rect">
+            <a:avLst/>
+          </a:prstGeom>
+        </p:spPr>
+      </p:pic>
     </p:spTree>
   </p:cSld>
   <p:clrMapOvr>
@@ -9173,6 +9193,66 @@
           </a:p>
         </p:txBody>
       </p:sp>
+      <p:pic>
+        <p:nvPicPr>
+          <p:cNvPr id="12" name="Picture 11">
+            <a:extLst>
+              <a:ext uri="{FF2B5EF4-FFF2-40B4-BE49-F238E27FC236}">
+                <a16:creationId xmlns:a16="http://schemas.microsoft.com/office/drawing/2014/main" id="{B80EEA62-940A-99F1-1874-134507DCEC87}"/>
+              </a:ext>
+            </a:extLst>
+          </p:cNvPr>
+          <p:cNvPicPr>
+            <a:picLocks noChangeAspect="1"/>
+          </p:cNvPicPr>
+          <p:nvPr/>
+        </p:nvPicPr>
+        <p:blipFill>
+          <a:blip r:embed="rId3"/>
+          <a:stretch>
+            <a:fillRect/>
+          </a:stretch>
+        </p:blipFill>
+        <p:spPr>
+          <a:xfrm>
+            <a:off x="4754880" y="611680"/>
+            <a:ext cx="4138042" cy="2196496"/>
+          </a:xfrm>
+          <a:prstGeom prst="rect">
+            <a:avLst/>
+          </a:prstGeom>
+        </p:spPr>
+      </p:pic>
+      <p:pic>
+        <p:nvPicPr>
+          <p:cNvPr id="16" name="Picture 15">
+            <a:extLst>
+              <a:ext uri="{FF2B5EF4-FFF2-40B4-BE49-F238E27FC236}">
+                <a16:creationId xmlns:a16="http://schemas.microsoft.com/office/drawing/2014/main" id="{2424C454-0560-3BF1-F457-17226AAA43F0}"/>
+              </a:ext>
+            </a:extLst>
+          </p:cNvPr>
+          <p:cNvPicPr>
+            <a:picLocks noChangeAspect="1"/>
+          </p:cNvPicPr>
+          <p:nvPr/>
+        </p:nvPicPr>
+        <p:blipFill>
+          <a:blip r:embed="rId4"/>
+          <a:stretch>
+            <a:fillRect/>
+          </a:stretch>
+        </p:blipFill>
+        <p:spPr>
+          <a:xfrm>
+            <a:off x="4764882" y="2808176"/>
+            <a:ext cx="4059078" cy="2229078"/>
+          </a:xfrm>
+          <a:prstGeom prst="rect">
+            <a:avLst/>
+          </a:prstGeom>
+        </p:spPr>
+      </p:pic>
     </p:spTree>
   </p:cSld>
   <p:clrMapOvr>
@@ -11038,6 +11118,36 @@
           </a:p>
         </p:txBody>
       </p:sp>
+      <p:pic>
+        <p:nvPicPr>
+          <p:cNvPr id="16" name="Picture 15">
+            <a:extLst>
+              <a:ext uri="{FF2B5EF4-FFF2-40B4-BE49-F238E27FC236}">
+                <a16:creationId xmlns:a16="http://schemas.microsoft.com/office/drawing/2014/main" id="{25B59127-22A6-69F7-7C2D-10341F1260CC}"/>
+              </a:ext>
+            </a:extLst>
+          </p:cNvPr>
+          <p:cNvPicPr>
+            <a:picLocks noChangeAspect="1"/>
+          </p:cNvPicPr>
+          <p:nvPr/>
+        </p:nvPicPr>
+        <p:blipFill>
+          <a:blip r:embed="rId3"/>
+          <a:stretch>
+            <a:fillRect/>
+          </a:stretch>
+        </p:blipFill>
+        <p:spPr>
+          <a:xfrm>
+            <a:off x="4617720" y="2752456"/>
+            <a:ext cx="4404360" cy="2221768"/>
+          </a:xfrm>
+          <a:prstGeom prst="rect">
+            <a:avLst/>
+          </a:prstGeom>
+        </p:spPr>
+      </p:pic>
     </p:spTree>
   </p:cSld>
   <p:clrMapOvr>
@@ -12777,6 +12887,36 @@
           </a:p>
         </p:txBody>
       </p:sp>
+      <p:pic>
+        <p:nvPicPr>
+          <p:cNvPr id="10" name="Picture 9">
+            <a:extLst>
+              <a:ext uri="{FF2B5EF4-FFF2-40B4-BE49-F238E27FC236}">
+                <a16:creationId xmlns:a16="http://schemas.microsoft.com/office/drawing/2014/main" id="{A9DE683F-5119-1681-A829-0D2AC2469C72}"/>
+              </a:ext>
+            </a:extLst>
+          </p:cNvPr>
+          <p:cNvPicPr>
+            <a:picLocks noChangeAspect="1"/>
+          </p:cNvPicPr>
+          <p:nvPr/>
+        </p:nvPicPr>
+        <p:blipFill>
+          <a:blip r:embed="rId3"/>
+          <a:stretch>
+            <a:fillRect/>
+          </a:stretch>
+        </p:blipFill>
+        <p:spPr>
+          <a:xfrm>
+            <a:off x="365760" y="1147572"/>
+            <a:ext cx="8614638" cy="3794760"/>
+          </a:xfrm>
+          <a:prstGeom prst="rect">
+            <a:avLst/>
+          </a:prstGeom>
+        </p:spPr>
+      </p:pic>
     </p:spTree>
   </p:cSld>
   <p:clrMapOvr>
@@ -13068,6 +13208,36 @@
           </a:p>
         </p:txBody>
       </p:sp>
+      <p:pic>
+        <p:nvPicPr>
+          <p:cNvPr id="11" name="Picture 10">
+            <a:extLst>
+              <a:ext uri="{FF2B5EF4-FFF2-40B4-BE49-F238E27FC236}">
+                <a16:creationId xmlns:a16="http://schemas.microsoft.com/office/drawing/2014/main" id="{E728CA9A-5B0F-6179-946E-DCEBEF8CBC19}"/>
+              </a:ext>
+            </a:extLst>
+          </p:cNvPr>
+          <p:cNvPicPr>
+            <a:picLocks noChangeAspect="1"/>
+          </p:cNvPicPr>
+          <p:nvPr/>
+        </p:nvPicPr>
+        <p:blipFill>
+          <a:blip r:embed="rId3"/>
+          <a:stretch>
+            <a:fillRect/>
+          </a:stretch>
+        </p:blipFill>
+        <p:spPr>
+          <a:xfrm>
+            <a:off x="259080" y="1170432"/>
+            <a:ext cx="8519160" cy="3909994"/>
+          </a:xfrm>
+          <a:prstGeom prst="rect">
+            <a:avLst/>
+          </a:prstGeom>
+        </p:spPr>
+      </p:pic>
     </p:spTree>
   </p:cSld>
   <p:clrMapOvr>
@@ -13669,6 +13839,36 @@
           </a:p>
         </p:txBody>
       </p:sp>
+      <p:pic>
+        <p:nvPicPr>
+          <p:cNvPr id="12" name="Picture 11">
+            <a:extLst>
+              <a:ext uri="{FF2B5EF4-FFF2-40B4-BE49-F238E27FC236}">
+                <a16:creationId xmlns:a16="http://schemas.microsoft.com/office/drawing/2014/main" id="{C6874BAA-3BAF-AACA-6C34-C38813263787}"/>
+              </a:ext>
+            </a:extLst>
+          </p:cNvPr>
+          <p:cNvPicPr>
+            <a:picLocks noChangeAspect="1"/>
+          </p:cNvPicPr>
+          <p:nvPr/>
+        </p:nvPicPr>
+        <p:blipFill>
+          <a:blip r:embed="rId3"/>
+          <a:stretch>
+            <a:fillRect/>
+          </a:stretch>
+        </p:blipFill>
+        <p:spPr>
+          <a:xfrm>
+            <a:off x="4617722" y="716280"/>
+            <a:ext cx="4524786" cy="4390644"/>
+          </a:xfrm>
+          <a:prstGeom prst="rect">
+            <a:avLst/>
+          </a:prstGeom>
+        </p:spPr>
+      </p:pic>
     </p:spTree>
   </p:cSld>
   <p:clrMapOvr>
